--- a/presentation/redesign_v3/DPS_Studio_组会汇报.pptx
+++ b/presentation/redesign_v3/DPS_Studio_组会汇报.pptx
@@ -2572,6 +2572,7 @@
             <a:spAutoFit/>
           </a:bodyPr>
           <a:p>
+            <a:pPr algn="ctr"/>
             <a:r>
               <a:rPr lang="en-US" altLang="zh-CN" sz="4000" b="1">
                 <a:latin typeface="微软雅黑" panose="020B0503020204020204" pitchFamily="34" charset="-122"/>
@@ -2604,7 +2605,7 @@
         </p:nvSpPr>
         <p:spPr>
           <a:xfrm>
-            <a:off x="3970655" y="4718050"/>
+            <a:off x="4063365" y="4718050"/>
             <a:ext cx="4064000" cy="368300"/>
           </a:xfrm>
           <a:prstGeom prst="rect">
@@ -2822,7 +2823,7 @@
                 <a:ea typeface="微软雅黑" panose="020B0503020204020204" pitchFamily="34" charset="-122"/>
                 <a:cs typeface="微软雅黑" panose="020B0503020204020204" pitchFamily="34" charset="-122"/>
               </a:rPr>
-              <a:t>起跳前平台全频率强度低于阈值，速度表现为</a:t>
+              <a:t>起跳前平台全频率强度低于阈值，速度表现为不存在</a:t>
             </a:r>
             <a:r>
               <a:rPr lang="en-US" sz="2000" b="1" dirty="0">
@@ -2833,7 +2834,7 @@
                 <a:ea typeface="微软雅黑" panose="020B0503020204020204" pitchFamily="34" charset="-122"/>
                 <a:cs typeface="微软雅黑" panose="020B0503020204020204" pitchFamily="34" charset="-122"/>
               </a:rPr>
-              <a:t>NaN(</a:t>
+              <a:t>(</a:t>
             </a:r>
             <a:r>
               <a:rPr lang="zh-CN" altLang="en-US" sz="2000" b="1" dirty="0">
@@ -8755,69 +8756,1248 @@
           </a:ln>
         </p:spPr>
       </p:sp>
-      <p:sp>
-        <p:nvSpPr>
-          <p:cNvPr id="7" name="Text 5"/>
-          <p:cNvSpPr/>
-          <p:nvPr/>
-        </p:nvSpPr>
-        <p:spPr>
-          <a:xfrm>
-            <a:off x="594360" y="1325245"/>
-            <a:ext cx="10766425" cy="760730"/>
-          </a:xfrm>
-          <a:prstGeom prst="rect">
-            <a:avLst/>
-          </a:prstGeom>
-          <a:noFill/>
-        </p:spPr>
-        <p:txBody>
-          <a:bodyPr wrap="square" lIns="0" tIns="0" rIns="0" bIns="0" rtlCol="0" anchor="ctr"/>
-          <a:lstStyle/>
-          <a:p>
-            <a:pPr marL="0" indent="0">
-              <a:buNone/>
-            </a:pPr>
-            <a:r>
-              <a:rPr lang="zh-CN" altLang="en-US" sz="1900" b="1" dirty="0">
-                <a:solidFill>
-                  <a:srgbClr val="8F2118"/>
-                </a:solidFill>
-                <a:latin typeface="微软雅黑" panose="020B0503020204020204" pitchFamily="34" charset="-122"/>
-                <a:ea typeface="微软雅黑" panose="020B0503020204020204" pitchFamily="34" charset="-122"/>
-                <a:cs typeface="微软雅黑" panose="020B0503020204020204" pitchFamily="34" charset="-120"/>
-              </a:rPr>
-              <a:t>运动界面改变两束光的相位差，示波器记录到随时间变化的拍频；软件通过 </a:t>
-            </a:r>
-            <a:r>
-              <a:rPr lang="en-US" altLang="zh-CN" sz="1900" b="1" dirty="0">
-                <a:solidFill>
-                  <a:srgbClr val="8F2118"/>
-                </a:solidFill>
-                <a:latin typeface="微软雅黑" panose="020B0503020204020204" pitchFamily="34" charset="-122"/>
-                <a:ea typeface="微软雅黑" panose="020B0503020204020204" pitchFamily="34" charset="-122"/>
-                <a:cs typeface="微软雅黑" panose="020B0503020204020204" pitchFamily="34" charset="-120"/>
-              </a:rPr>
-              <a:t>STFT </a:t>
-            </a:r>
-            <a:r>
-              <a:rPr lang="zh-CN" altLang="en-US" sz="1900" b="1" dirty="0">
-                <a:solidFill>
-                  <a:srgbClr val="8F2118"/>
-                </a:solidFill>
-                <a:latin typeface="微软雅黑" panose="020B0503020204020204" pitchFamily="34" charset="-122"/>
-                <a:ea typeface="微软雅黑" panose="020B0503020204020204" pitchFamily="34" charset="-122"/>
-                <a:cs typeface="微软雅黑" panose="020B0503020204020204" pitchFamily="34" charset="-120"/>
-              </a:rPr>
-              <a:t>找出拍频脊线，再将其换算为表观速度。</a:t>
-            </a:r>
-            <a:endParaRPr lang="zh-CN" altLang="en-US" sz="1900" b="1" dirty="0">
-              <a:solidFill>
-                <a:srgbClr val="8F2118"/>
-              </a:solidFill>
+      <mc:AlternateContent xmlns:mc="http://schemas.openxmlformats.org/markup-compatibility/2006">
+        <mc:Choice xmlns:a14="http://schemas.microsoft.com/office/drawing/2010/main" Requires="a14">
+          <p:sp>
+            <p:nvSpPr>
+              <p:cNvPr id="6" name="文本框 5"/>
+              <p:cNvSpPr txBox="1"/>
+              <p:nvPr/>
+            </p:nvSpPr>
+            <p:spPr>
+              <a:xfrm>
+                <a:off x="3697859" y="2366581"/>
+                <a:ext cx="4558665" cy="422275"/>
+              </a:xfrm>
+              <a:prstGeom prst="rect">
+                <a:avLst/>
+              </a:prstGeom>
+              <a:noFill/>
+            </p:spPr>
+            <p:txBody>
+              <a:bodyPr wrap="none" rtlCol="0" anchor="t">
+                <a:spAutoFit/>
+              </a:bodyPr>
+              <a:p>
+                <a:pPr algn="l"/>
+                <a14:m>
+                  <m:oMathPara xmlns:m="http://schemas.openxmlformats.org/officeDocument/2006/math">
+                    <m:oMathParaPr>
+                      <m:jc m:val="centerGroup"/>
+                    </m:oMathParaPr>
+                    <m:oMath xmlns:m="http://schemas.openxmlformats.org/officeDocument/2006/math">
+                      <m:r>
+                        <a:rPr lang="en-US" altLang="zh-CN" i="1">
+                          <a:latin typeface="Cambria Math" panose="02040503050406030204" charset="0"/>
+                          <a:cs typeface="Cambria Math" panose="02040503050406030204" charset="0"/>
+                        </a:rPr>
+                        <m:t>𝐼</m:t>
+                      </m:r>
+                      <m:r>
+                        <a:rPr lang="en-US" altLang="zh-CN" i="1">
+                          <a:latin typeface="Cambria Math" panose="02040503050406030204" charset="0"/>
+                          <a:ea typeface="MS Mincho" charset="0"/>
+                          <a:cs typeface="Cambria Math" panose="02040503050406030204" charset="0"/>
+                        </a:rPr>
+                        <m:t>(</m:t>
+                      </m:r>
+                      <m:r>
+                        <a:rPr lang="en-US" altLang="zh-CN" i="1">
+                          <a:latin typeface="Cambria Math" panose="02040503050406030204" charset="0"/>
+                          <a:cs typeface="Cambria Math" panose="02040503050406030204" charset="0"/>
+                        </a:rPr>
+                        <m:t>𝑡</m:t>
+                      </m:r>
+                      <m:r>
+                        <a:rPr lang="en-US" altLang="zh-CN" i="1">
+                          <a:latin typeface="Cambria Math" panose="02040503050406030204" charset="0"/>
+                          <a:ea typeface="MS Mincho" charset="0"/>
+                          <a:cs typeface="Cambria Math" panose="02040503050406030204" charset="0"/>
+                        </a:rPr>
+                        <m:t>)=</m:t>
+                      </m:r>
+                      <m:sSub>
+                        <m:sSubPr>
+                          <m:ctrlPr>
+                            <a:rPr lang="en-US" altLang="zh-CN" i="1">
+                              <a:latin typeface="Cambria Math" panose="02040503050406030204" charset="0"/>
+                              <a:cs typeface="Cambria Math" panose="02040503050406030204" charset="0"/>
+                            </a:rPr>
+                          </m:ctrlPr>
+                        </m:sSubPr>
+                        <m:e>
+                          <m:r>
+                            <a:rPr lang="en-US" altLang="zh-CN" i="1">
+                              <a:latin typeface="Cambria Math" panose="02040503050406030204" charset="0"/>
+                              <a:cs typeface="Cambria Math" panose="02040503050406030204" charset="0"/>
+                            </a:rPr>
+                            <m:t>𝐼</m:t>
+                          </m:r>
+                        </m:e>
+                        <m:sub>
+                          <m:r>
+                            <a:rPr lang="en-US" altLang="zh-CN" i="1">
+                              <a:latin typeface="Cambria Math" panose="02040503050406030204" charset="0"/>
+                              <a:cs typeface="Cambria Math" panose="02040503050406030204" charset="0"/>
+                            </a:rPr>
+                            <m:t>𝑟</m:t>
+                          </m:r>
+                        </m:sub>
+                      </m:sSub>
+                      <m:r>
+                        <a:rPr lang="en-US" altLang="zh-CN" i="1">
+                          <a:latin typeface="Cambria Math" panose="02040503050406030204" charset="0"/>
+                          <a:ea typeface="MS Mincho" charset="0"/>
+                          <a:cs typeface="Cambria Math" panose="02040503050406030204" charset="0"/>
+                        </a:rPr>
+                        <m:t>+</m:t>
+                      </m:r>
+                      <m:sSub>
+                        <m:sSubPr>
+                          <m:ctrlPr>
+                            <a:rPr lang="en-US" altLang="zh-CN" i="1">
+                              <a:latin typeface="Cambria Math" panose="02040503050406030204" charset="0"/>
+                              <a:cs typeface="Cambria Math" panose="02040503050406030204" charset="0"/>
+                            </a:rPr>
+                          </m:ctrlPr>
+                        </m:sSubPr>
+                        <m:e>
+                          <m:r>
+                            <a:rPr lang="en-US" altLang="zh-CN" i="1">
+                              <a:latin typeface="Cambria Math" panose="02040503050406030204" charset="0"/>
+                              <a:cs typeface="Cambria Math" panose="02040503050406030204" charset="0"/>
+                            </a:rPr>
+                            <m:t>𝐼</m:t>
+                          </m:r>
+                        </m:e>
+                        <m:sub>
+                          <m:r>
+                            <a:rPr lang="en-US" altLang="zh-CN" i="1">
+                              <a:latin typeface="Cambria Math" panose="02040503050406030204" charset="0"/>
+                              <a:cs typeface="Cambria Math" panose="02040503050406030204" charset="0"/>
+                            </a:rPr>
+                            <m:t>𝑠</m:t>
+                          </m:r>
+                        </m:sub>
+                      </m:sSub>
+                      <m:r>
+                        <a:rPr lang="en-US" altLang="zh-CN" i="1">
+                          <a:latin typeface="Cambria Math" panose="02040503050406030204" charset="0"/>
+                          <a:ea typeface="MS Mincho" charset="0"/>
+                          <a:cs typeface="Cambria Math" panose="02040503050406030204" charset="0"/>
+                        </a:rPr>
+                        <m:t>+2</m:t>
+                      </m:r>
+                      <m:rad>
+                        <m:radPr>
+                          <m:degHide m:val="on"/>
+                          <m:ctrlPr>
+                            <a:rPr lang="en-US" altLang="zh-CN" i="1">
+                              <a:latin typeface="Cambria Math" panose="02040503050406030204" charset="0"/>
+                              <a:cs typeface="Cambria Math" panose="02040503050406030204" charset="0"/>
+                            </a:rPr>
+                          </m:ctrlPr>
+                        </m:radPr>
+                        <m:deg/>
+                        <m:e>
+                          <m:sSub>
+                            <m:sSubPr>
+                              <m:ctrlPr>
+                                <a:rPr lang="en-US" altLang="zh-CN" i="1">
+                                  <a:latin typeface="Cambria Math" panose="02040503050406030204" charset="0"/>
+                                  <a:cs typeface="Cambria Math" panose="02040503050406030204" charset="0"/>
+                                </a:rPr>
+                              </m:ctrlPr>
+                            </m:sSubPr>
+                            <m:e>
+                              <m:r>
+                                <a:rPr lang="en-US" altLang="zh-CN" i="1">
+                                  <a:latin typeface="Cambria Math" panose="02040503050406030204" charset="0"/>
+                                  <a:cs typeface="Cambria Math" panose="02040503050406030204" charset="0"/>
+                                </a:rPr>
+                                <m:t>𝐼</m:t>
+                              </m:r>
+                            </m:e>
+                            <m:sub>
+                              <m:r>
+                                <a:rPr lang="en-US" altLang="zh-CN" i="1">
+                                  <a:latin typeface="Cambria Math" panose="02040503050406030204" charset="0"/>
+                                  <a:cs typeface="Cambria Math" panose="02040503050406030204" charset="0"/>
+                                </a:rPr>
+                                <m:t>𝑟</m:t>
+                              </m:r>
+                            </m:sub>
+                          </m:sSub>
+                          <m:sSub>
+                            <m:sSubPr>
+                              <m:ctrlPr>
+                                <a:rPr lang="en-US" altLang="zh-CN" i="1">
+                                  <a:latin typeface="Cambria Math" panose="02040503050406030204" charset="0"/>
+                                  <a:cs typeface="Cambria Math" panose="02040503050406030204" charset="0"/>
+                                </a:rPr>
+                              </m:ctrlPr>
+                            </m:sSubPr>
+                            <m:e>
+                              <m:r>
+                                <a:rPr lang="en-US" altLang="zh-CN" i="1">
+                                  <a:latin typeface="Cambria Math" panose="02040503050406030204" charset="0"/>
+                                  <a:cs typeface="Cambria Math" panose="02040503050406030204" charset="0"/>
+                                </a:rPr>
+                                <m:t>𝐼</m:t>
+                              </m:r>
+                            </m:e>
+                            <m:sub>
+                              <m:r>
+                                <a:rPr lang="en-US" altLang="zh-CN" i="1">
+                                  <a:latin typeface="Cambria Math" panose="02040503050406030204" charset="0"/>
+                                  <a:cs typeface="Cambria Math" panose="02040503050406030204" charset="0"/>
+                                </a:rPr>
+                                <m:t>𝑠</m:t>
+                              </m:r>
+                            </m:sub>
+                          </m:sSub>
+                        </m:e>
+                      </m:rad>
+                      <m:func>
+                        <m:funcPr>
+                          <m:ctrlPr>
+                            <a:rPr lang="en-US" altLang="zh-CN" i="1">
+                              <a:latin typeface="Cambria Math" panose="02040503050406030204" charset="0"/>
+                              <a:cs typeface="Cambria Math" panose="02040503050406030204" charset="0"/>
+                            </a:rPr>
+                          </m:ctrlPr>
+                        </m:funcPr>
+                        <m:fName>
+                          <m:r>
+                            <a:rPr lang="en-US" altLang="zh-CN" i="1">
+                              <a:latin typeface="Cambria Math" panose="02040503050406030204" charset="0"/>
+                              <a:cs typeface="Cambria Math" panose="02040503050406030204" charset="0"/>
+                            </a:rPr>
+                            <m:t>cos</m:t>
+                          </m:r>
+                        </m:fName>
+                        <m:e>
+                          <m:r>
+                            <a:rPr lang="en-US" altLang="zh-CN" i="1">
+                              <a:latin typeface="Cambria Math" panose="02040503050406030204" charset="0"/>
+                              <a:ea typeface="MS Mincho" charset="0"/>
+                              <a:cs typeface="Cambria Math" panose="02040503050406030204" charset="0"/>
+                            </a:rPr>
+                            <m:t>𝛥</m:t>
+                          </m:r>
+                        </m:e>
+                      </m:func>
+                      <m:r>
+                        <a:rPr lang="en-US" altLang="zh-CN" i="1">
+                          <a:latin typeface="Cambria Math" panose="02040503050406030204" charset="0"/>
+                          <a:ea typeface="MS Mincho" charset="0"/>
+                          <a:cs typeface="Cambria Math" panose="02040503050406030204" charset="0"/>
+                        </a:rPr>
+                        <m:t>𝜙</m:t>
+                      </m:r>
+                      <m:r>
+                        <a:rPr lang="en-US" altLang="zh-CN" i="1">
+                          <a:latin typeface="Cambria Math" panose="02040503050406030204" charset="0"/>
+                          <a:ea typeface="MS Mincho" charset="0"/>
+                          <a:cs typeface="Cambria Math" panose="02040503050406030204" charset="0"/>
+                        </a:rPr>
+                        <m:t>(</m:t>
+                      </m:r>
+                      <m:r>
+                        <a:rPr lang="en-US" altLang="zh-CN" i="1">
+                          <a:latin typeface="Cambria Math" panose="02040503050406030204" charset="0"/>
+                          <a:cs typeface="Cambria Math" panose="02040503050406030204" charset="0"/>
+                        </a:rPr>
+                        <m:t>𝑡</m:t>
+                      </m:r>
+                      <m:r>
+                        <a:rPr lang="en-US" altLang="zh-CN" i="1">
+                          <a:latin typeface="Cambria Math" panose="02040503050406030204" charset="0"/>
+                          <a:ea typeface="MS Mincho" charset="0"/>
+                          <a:cs typeface="Cambria Math" panose="02040503050406030204" charset="0"/>
+                        </a:rPr>
+                        <m:t>)</m:t>
+                      </m:r>
+                    </m:oMath>
+                  </m:oMathPara>
+                </a14:m>
+                <a:endParaRPr lang="en-US" altLang="zh-CN" i="1">
+                  <a:latin typeface="Cambria Math" panose="02040503050406030204" charset="0"/>
+                  <a:cs typeface="Cambria Math" panose="02040503050406030204" charset="0"/>
+                </a:endParaRPr>
+              </a:p>
+            </p:txBody>
+          </p:sp>
+        </mc:Choice>
+        <mc:Fallback>
+          <p:sp>
+            <p:nvSpPr>
+              <p:cNvPr id="6" name="文本框 5"/>
+              <p:cNvSpPr txBox="1">
+                <a:spLocks noRot="1" noChangeAspect="1" noMove="1" noResize="1" noEditPoints="1" noAdjustHandles="1" noChangeArrowheads="1" noChangeShapeType="1" noTextEdit="1"/>
+              </p:cNvSpPr>
+              <p:nvPr/>
+            </p:nvSpPr>
+            <p:spPr>
+              <a:xfrm>
+                <a:off x="3697859" y="2366581"/>
+                <a:ext cx="4558665" cy="422275"/>
+              </a:xfrm>
+              <a:prstGeom prst="rect">
+                <a:avLst/>
+              </a:prstGeom>
+              <a:blipFill rotWithShape="1">
+                <a:blip r:embed="rId1"/>
+                <a:stretch>
+                  <a:fillRect l="-6" t="-135" r="6" b="135"/>
+                </a:stretch>
+              </a:blipFill>
+            </p:spPr>
+            <p:txBody>
+              <a:bodyPr/>
+              <a:lstStyle/>
+              <a:p>
+                <a:r>
+                  <a:rPr lang="zh-CN" altLang="en-US">
+                    <a:noFill/>
+                  </a:rPr>
+                  <a:t> </a:t>
+                </a:r>
+              </a:p>
+            </p:txBody>
+          </p:sp>
+        </mc:Fallback>
+      </mc:AlternateContent>
+      <mc:AlternateContent xmlns:mc="http://schemas.openxmlformats.org/markup-compatibility/2006">
+        <mc:Choice xmlns:a14="http://schemas.microsoft.com/office/drawing/2010/main" Requires="a14">
+          <p:sp>
+            <p:nvSpPr>
+              <p:cNvPr id="8" name="文本框 7"/>
+              <p:cNvSpPr txBox="1"/>
+              <p:nvPr/>
+            </p:nvSpPr>
+            <p:spPr>
+              <a:xfrm>
+                <a:off x="4162044" y="2877121"/>
+                <a:ext cx="3404235" cy="660400"/>
+              </a:xfrm>
+              <a:prstGeom prst="rect">
+                <a:avLst/>
+              </a:prstGeom>
+              <a:noFill/>
+            </p:spPr>
+            <p:txBody>
+              <a:bodyPr wrap="none" rtlCol="0" anchor="t">
+                <a:spAutoFit/>
+              </a:bodyPr>
+              <a:p>
+                <a:pPr algn="l"/>
+                <a14:m>
+                  <m:oMathPara xmlns:m="http://schemas.openxmlformats.org/officeDocument/2006/math">
+                    <m:oMathParaPr>
+                      <m:jc m:val="centerGroup"/>
+                    </m:oMathParaPr>
+                    <m:oMath xmlns:m="http://schemas.openxmlformats.org/officeDocument/2006/math">
+                      <m:r>
+                        <a:rPr lang="en-US" altLang="zh-CN" i="1">
+                          <a:latin typeface="Cambria Math" panose="02040503050406030204" charset="0"/>
+                          <a:cs typeface="Cambria Math" panose="02040503050406030204" charset="0"/>
+                        </a:rPr>
+                        <m:t>𝛥𝜙</m:t>
+                      </m:r>
+                      <m:r>
+                        <a:rPr lang="en-US" altLang="zh-CN" i="1">
+                          <a:latin typeface="Cambria Math" panose="02040503050406030204" charset="0"/>
+                          <a:cs typeface="Cambria Math" panose="02040503050406030204" charset="0"/>
+                        </a:rPr>
+                        <m:t>(</m:t>
+                      </m:r>
+                      <m:r>
+                        <a:rPr lang="en-US" altLang="zh-CN" i="1">
+                          <a:latin typeface="Cambria Math" panose="02040503050406030204" charset="0"/>
+                          <a:cs typeface="Cambria Math" panose="02040503050406030204" charset="0"/>
+                        </a:rPr>
+                        <m:t>𝑡</m:t>
+                      </m:r>
+                      <m:r>
+                        <a:rPr lang="en-US" altLang="zh-CN" i="1">
+                          <a:latin typeface="Cambria Math" panose="02040503050406030204" charset="0"/>
+                          <a:cs typeface="Cambria Math" panose="02040503050406030204" charset="0"/>
+                        </a:rPr>
+                        <m:t>)=</m:t>
+                      </m:r>
+                      <m:f>
+                        <m:fPr>
+                          <m:ctrlPr>
+                            <a:rPr lang="en-US" altLang="zh-CN" i="1">
+                              <a:latin typeface="Cambria Math" panose="02040503050406030204" charset="0"/>
+                              <a:cs typeface="Cambria Math" panose="02040503050406030204" charset="0"/>
+                            </a:rPr>
+                          </m:ctrlPr>
+                        </m:fPr>
+                        <m:num>
+                          <m:r>
+                            <a:rPr lang="en-US" altLang="zh-CN" i="1">
+                              <a:latin typeface="Cambria Math" panose="02040503050406030204" charset="0"/>
+                              <a:cs typeface="Cambria Math" panose="02040503050406030204" charset="0"/>
+                            </a:rPr>
+                            <m:t>4</m:t>
+                          </m:r>
+                          <m:r>
+                            <a:rPr lang="en-US" altLang="zh-CN" i="1">
+                              <a:latin typeface="Cambria Math" panose="02040503050406030204" charset="0"/>
+                              <a:cs typeface="Cambria Math" panose="02040503050406030204" charset="0"/>
+                            </a:rPr>
+                            <m:t>𝜋</m:t>
+                          </m:r>
+                          <m:r>
+                            <a:rPr lang="en-US" altLang="zh-CN" i="1">
+                              <a:latin typeface="Cambria Math" panose="02040503050406030204" charset="0"/>
+                              <a:cs typeface="Cambria Math" panose="02040503050406030204" charset="0"/>
+                            </a:rPr>
+                            <m:t>𝑥</m:t>
+                          </m:r>
+                          <m:r>
+                            <a:rPr lang="en-US" altLang="zh-CN" i="1">
+                              <a:latin typeface="Cambria Math" panose="02040503050406030204" charset="0"/>
+                              <a:cs typeface="Cambria Math" panose="02040503050406030204" charset="0"/>
+                            </a:rPr>
+                            <m:t>(</m:t>
+                          </m:r>
+                          <m:r>
+                            <a:rPr lang="en-US" altLang="zh-CN" i="1">
+                              <a:latin typeface="Cambria Math" panose="02040503050406030204" charset="0"/>
+                              <a:cs typeface="Cambria Math" panose="02040503050406030204" charset="0"/>
+                            </a:rPr>
+                            <m:t>𝑡</m:t>
+                          </m:r>
+                          <m:r>
+                            <a:rPr lang="en-US" altLang="zh-CN" i="1">
+                              <a:latin typeface="Cambria Math" panose="02040503050406030204" charset="0"/>
+                              <a:cs typeface="Cambria Math" panose="02040503050406030204" charset="0"/>
+                            </a:rPr>
+                            <m:t>)</m:t>
+                          </m:r>
+                        </m:num>
+                        <m:den>
+                          <m:sSub>
+                            <m:sSubPr>
+                              <m:ctrlPr>
+                                <a:rPr lang="en-US" altLang="zh-CN" i="1">
+                                  <a:latin typeface="Cambria Math" panose="02040503050406030204" charset="0"/>
+                                  <a:cs typeface="Cambria Math" panose="02040503050406030204" charset="0"/>
+                                </a:rPr>
+                              </m:ctrlPr>
+                            </m:sSubPr>
+                            <m:e>
+                              <m:r>
+                                <a:rPr lang="en-US" altLang="zh-CN" i="1">
+                                  <a:latin typeface="Cambria Math" panose="02040503050406030204" charset="0"/>
+                                  <a:cs typeface="Cambria Math" panose="02040503050406030204" charset="0"/>
+                                </a:rPr>
+                                <m:t>𝜆</m:t>
+                              </m:r>
+                            </m:e>
+                            <m:sub>
+                              <m:r>
+                                <a:rPr lang="en-US" altLang="zh-CN" i="1">
+                                  <a:latin typeface="Cambria Math" panose="02040503050406030204" charset="0"/>
+                                  <a:cs typeface="Cambria Math" panose="02040503050406030204" charset="0"/>
+                                </a:rPr>
+                                <m:t>0</m:t>
+                              </m:r>
+                            </m:sub>
+                          </m:sSub>
+                        </m:den>
+                      </m:f>
+                    </m:oMath>
+                  </m:oMathPara>
+                </a14:m>
+                <a:endParaRPr lang="en-US" altLang="zh-CN" i="1">
+                  <a:latin typeface="Cambria Math" panose="02040503050406030204" charset="0"/>
+                  <a:cs typeface="Cambria Math" panose="02040503050406030204" charset="0"/>
+                </a:endParaRPr>
+              </a:p>
+            </p:txBody>
+          </p:sp>
+        </mc:Choice>
+        <mc:Fallback>
+          <p:sp>
+            <p:nvSpPr>
+              <p:cNvPr id="8" name="文本框 7"/>
+              <p:cNvSpPr txBox="1">
+                <a:spLocks noRot="1" noChangeAspect="1" noMove="1" noResize="1" noEditPoints="1" noAdjustHandles="1" noChangeArrowheads="1" noChangeShapeType="1" noTextEdit="1"/>
+              </p:cNvSpPr>
+              <p:nvPr/>
+            </p:nvSpPr>
+            <p:spPr>
+              <a:xfrm>
+                <a:off x="4162044" y="2877121"/>
+                <a:ext cx="3404235" cy="660400"/>
+              </a:xfrm>
+              <a:prstGeom prst="rect">
+                <a:avLst/>
+              </a:prstGeom>
+              <a:blipFill rotWithShape="1">
+                <a:blip r:embed="rId2"/>
+                <a:stretch>
+                  <a:fillRect l="-7" t="-87" r="7" b="87"/>
+                </a:stretch>
+              </a:blipFill>
+            </p:spPr>
+            <p:txBody>
+              <a:bodyPr/>
+              <a:lstStyle/>
+              <a:p>
+                <a:r>
+                  <a:rPr lang="zh-CN" altLang="en-US">
+                    <a:noFill/>
+                  </a:rPr>
+                  <a:t> </a:t>
+                </a:r>
+              </a:p>
+            </p:txBody>
+          </p:sp>
+        </mc:Fallback>
+      </mc:AlternateContent>
+      <mc:AlternateContent xmlns:mc="http://schemas.openxmlformats.org/markup-compatibility/2006">
+        <mc:Choice xmlns:a14="http://schemas.microsoft.com/office/drawing/2010/main" Requires="a14">
+          <p:sp>
+            <p:nvSpPr>
+              <p:cNvPr id="9" name="文本框 8"/>
+              <p:cNvSpPr txBox="1"/>
+              <p:nvPr/>
+            </p:nvSpPr>
+            <p:spPr>
+              <a:xfrm>
+                <a:off x="2465324" y="4265866"/>
+                <a:ext cx="7260590" cy="760095"/>
+              </a:xfrm>
+              <a:prstGeom prst="rect">
+                <a:avLst/>
+              </a:prstGeom>
+              <a:noFill/>
+            </p:spPr>
+            <p:txBody>
+              <a:bodyPr wrap="none" rtlCol="0" anchor="t">
+                <a:spAutoFit/>
+              </a:bodyPr>
+              <a:p>
+                <a:pPr algn="l"/>
+                <a14:m>
+                  <m:oMathPara xmlns:m="http://schemas.openxmlformats.org/officeDocument/2006/math">
+                    <m:oMathParaPr>
+                      <m:jc m:val="centerGroup"/>
+                    </m:oMathParaPr>
+                    <m:oMath xmlns:m="http://schemas.openxmlformats.org/officeDocument/2006/math">
+                      <m:r>
+                        <a:rPr lang="en-US" altLang="zh-CN" i="1">
+                          <a:latin typeface="Cambria Math" panose="02040503050406030204" charset="0"/>
+                          <a:cs typeface="Cambria Math" panose="02040503050406030204" charset="0"/>
+                        </a:rPr>
+                        <m:t>𝑆</m:t>
+                      </m:r>
+                      <m:r>
+                        <a:rPr lang="en-US" altLang="zh-CN" i="1">
+                          <a:latin typeface="Cambria Math" panose="02040503050406030204" charset="0"/>
+                          <a:cs typeface="Cambria Math" panose="02040503050406030204" charset="0"/>
+                        </a:rPr>
+                        <m:t>(</m:t>
+                      </m:r>
+                      <m:r>
+                        <a:rPr lang="en-US" altLang="zh-CN" i="1">
+                          <a:latin typeface="Cambria Math" panose="02040503050406030204" charset="0"/>
+                          <a:cs typeface="Cambria Math" panose="02040503050406030204" charset="0"/>
+                        </a:rPr>
+                        <m:t>𝜏</m:t>
+                      </m:r>
+                      <m:r>
+                        <a:rPr lang="en-US" altLang="zh-CN" i="1">
+                          <a:latin typeface="Cambria Math" panose="02040503050406030204" charset="0"/>
+                          <a:cs typeface="Cambria Math" panose="02040503050406030204" charset="0"/>
+                        </a:rPr>
+                        <m:t>,</m:t>
+                      </m:r>
+                      <m:r>
+                        <a:rPr lang="en-US" altLang="zh-CN" i="1">
+                          <a:latin typeface="Cambria Math" panose="02040503050406030204" charset="0"/>
+                          <a:cs typeface="Cambria Math" panose="02040503050406030204" charset="0"/>
+                        </a:rPr>
+                        <m:t>𝑓</m:t>
+                      </m:r>
+                      <m:r>
+                        <a:rPr lang="en-US" altLang="zh-CN" i="1">
+                          <a:latin typeface="Cambria Math" panose="02040503050406030204" charset="0"/>
+                          <a:cs typeface="Cambria Math" panose="02040503050406030204" charset="0"/>
+                        </a:rPr>
+                        <m:t>)=</m:t>
+                      </m:r>
+                      <m:sSup>
+                        <m:sSupPr>
+                          <m:ctrlPr>
+                            <a:rPr lang="en-US" altLang="zh-CN" i="1">
+                              <a:latin typeface="Cambria Math" panose="02040503050406030204" charset="0"/>
+                              <a:cs typeface="Cambria Math" panose="02040503050406030204" charset="0"/>
+                            </a:rPr>
+                          </m:ctrlPr>
+                        </m:sSupPr>
+                        <m:e>
+                          <m:d>
+                            <m:dPr>
+                              <m:begChr m:val="|"/>
+                              <m:endChr m:val="|"/>
+                              <m:ctrlPr>
+                                <a:rPr lang="en-US" altLang="zh-CN" i="1">
+                                  <a:latin typeface="Cambria Math" panose="02040503050406030204" charset="0"/>
+                                  <a:cs typeface="Cambria Math" panose="02040503050406030204" charset="0"/>
+                                </a:rPr>
+                              </m:ctrlPr>
+                            </m:dPr>
+                            <m:e>
+                              <m:nary>
+                                <m:naryPr>
+                                  <m:limLoc m:val="subSup"/>
+                                  <m:ctrlPr>
+                                    <a:rPr lang="en-US" altLang="zh-CN" i="1">
+                                      <a:latin typeface="Cambria Math" panose="02040503050406030204" charset="0"/>
+                                      <a:cs typeface="Cambria Math" panose="02040503050406030204" charset="0"/>
+                                    </a:rPr>
+                                  </m:ctrlPr>
+                                </m:naryPr>
+                                <m:sub>
+                                  <m:r>
+                                    <a:rPr lang="en-US" altLang="zh-CN" i="1">
+                                      <a:latin typeface="Cambria Math" panose="02040503050406030204" charset="0"/>
+                                      <a:cs typeface="Cambria Math" panose="02040503050406030204" charset="0"/>
+                                    </a:rPr>
+                                    <m:t>−∞</m:t>
+                                  </m:r>
+                                </m:sub>
+                                <m:sup>
+                                  <m:r>
+                                    <a:rPr lang="en-US" altLang="zh-CN" i="1">
+                                      <a:latin typeface="Cambria Math" panose="02040503050406030204" charset="0"/>
+                                      <a:cs typeface="Cambria Math" panose="02040503050406030204" charset="0"/>
+                                    </a:rPr>
+                                    <m:t>+∞</m:t>
+                                  </m:r>
+                                </m:sup>
+                                <m:e>
+                                  <m:r>
+                                    <a:rPr lang="en-US" altLang="zh-CN" i="1">
+                                      <a:latin typeface="Cambria Math" panose="02040503050406030204" charset="0"/>
+                                      <a:cs typeface="Cambria Math" panose="02040503050406030204" charset="0"/>
+                                    </a:rPr>
+                                    <m:t>𝑠</m:t>
+                                  </m:r>
+                                </m:e>
+                              </m:nary>
+                              <m:r>
+                                <a:rPr lang="en-US" altLang="zh-CN" i="1">
+                                  <a:latin typeface="Cambria Math" panose="02040503050406030204" charset="0"/>
+                                  <a:cs typeface="Cambria Math" panose="02040503050406030204" charset="0"/>
+                                </a:rPr>
+                                <m:t>(</m:t>
+                              </m:r>
+                              <m:r>
+                                <a:rPr lang="en-US" altLang="zh-CN" i="1">
+                                  <a:latin typeface="Cambria Math" panose="02040503050406030204" charset="0"/>
+                                  <a:cs typeface="Cambria Math" panose="02040503050406030204" charset="0"/>
+                                </a:rPr>
+                                <m:t>𝑡</m:t>
+                              </m:r>
+                              <m:r>
+                                <a:rPr lang="en-US" altLang="zh-CN" i="1">
+                                  <a:latin typeface="Cambria Math" panose="02040503050406030204" charset="0"/>
+                                  <a:cs typeface="Cambria Math" panose="02040503050406030204" charset="0"/>
+                                </a:rPr>
+                                <m:t>)</m:t>
+                              </m:r>
+                              <m:r>
+                                <a:rPr lang="en-US" altLang="zh-CN" i="1">
+                                  <a:latin typeface="Cambria Math" panose="02040503050406030204" charset="0"/>
+                                  <a:cs typeface="Cambria Math" panose="02040503050406030204" charset="0"/>
+                                </a:rPr>
+                                <m:t>𝑤</m:t>
+                              </m:r>
+                              <m:r>
+                                <a:rPr lang="en-US" altLang="zh-CN" i="1">
+                                  <a:latin typeface="Cambria Math" panose="02040503050406030204" charset="0"/>
+                                  <a:cs typeface="Cambria Math" panose="02040503050406030204" charset="0"/>
+                                </a:rPr>
+                                <m:t>(</m:t>
+                              </m:r>
+                              <m:r>
+                                <a:rPr lang="en-US" altLang="zh-CN" i="1">
+                                  <a:latin typeface="Cambria Math" panose="02040503050406030204" charset="0"/>
+                                  <a:cs typeface="Cambria Math" panose="02040503050406030204" charset="0"/>
+                                </a:rPr>
+                                <m:t>𝑡</m:t>
+                              </m:r>
+                              <m:r>
+                                <a:rPr lang="en-US" altLang="zh-CN" i="1">
+                                  <a:latin typeface="Cambria Math" panose="02040503050406030204" charset="0"/>
+                                  <a:cs typeface="Cambria Math" panose="02040503050406030204" charset="0"/>
+                                </a:rPr>
+                                <m:t>−</m:t>
+                              </m:r>
+                              <m:r>
+                                <a:rPr lang="en-US" altLang="zh-CN" i="1">
+                                  <a:latin typeface="Cambria Math" panose="02040503050406030204" charset="0"/>
+                                  <a:cs typeface="Cambria Math" panose="02040503050406030204" charset="0"/>
+                                </a:rPr>
+                                <m:t>𝜏</m:t>
+                              </m:r>
+                              <m:r>
+                                <a:rPr lang="en-US" altLang="zh-CN" i="1">
+                                  <a:latin typeface="Cambria Math" panose="02040503050406030204" charset="0"/>
+                                  <a:cs typeface="Cambria Math" panose="02040503050406030204" charset="0"/>
+                                </a:rPr>
+                                <m:t>)</m:t>
+                              </m:r>
+                              <m:sSup>
+                                <m:sSupPr>
+                                  <m:ctrlPr>
+                                    <a:rPr lang="en-US" altLang="zh-CN" i="1">
+                                      <a:latin typeface="Cambria Math" panose="02040503050406030204" charset="0"/>
+                                      <a:cs typeface="Cambria Math" panose="02040503050406030204" charset="0"/>
+                                    </a:rPr>
+                                  </m:ctrlPr>
+                                </m:sSupPr>
+                                <m:e>
+                                  <m:r>
+                                    <a:rPr lang="en-US" altLang="zh-CN" i="1">
+                                      <a:latin typeface="Cambria Math" panose="02040503050406030204" charset="0"/>
+                                      <a:cs typeface="Cambria Math" panose="02040503050406030204" charset="0"/>
+                                    </a:rPr>
+                                    <m:t>𝑒</m:t>
+                                  </m:r>
+                                </m:e>
+                                <m:sup>
+                                  <m:r>
+                                    <a:rPr lang="en-US" altLang="zh-CN" i="1">
+                                      <a:latin typeface="Cambria Math" panose="02040503050406030204" charset="0"/>
+                                      <a:cs typeface="Cambria Math" panose="02040503050406030204" charset="0"/>
+                                    </a:rPr>
+                                    <m:t>−</m:t>
+                                  </m:r>
+                                  <m:r>
+                                    <a:rPr lang="en-US" altLang="zh-CN" i="1">
+                                      <a:latin typeface="Cambria Math" panose="02040503050406030204" charset="0"/>
+                                      <a:cs typeface="Cambria Math" panose="02040503050406030204" charset="0"/>
+                                    </a:rPr>
+                                    <m:t>𝑖</m:t>
+                                  </m:r>
+                                  <m:r>
+                                    <a:rPr lang="en-US" altLang="zh-CN" i="1">
+                                      <a:latin typeface="Cambria Math" panose="02040503050406030204" charset="0"/>
+                                      <a:cs typeface="Cambria Math" panose="02040503050406030204" charset="0"/>
+                                    </a:rPr>
+                                    <m:t>2</m:t>
+                                  </m:r>
+                                  <m:r>
+                                    <a:rPr lang="en-US" altLang="zh-CN" i="1">
+                                      <a:latin typeface="Cambria Math" panose="02040503050406030204" charset="0"/>
+                                      <a:cs typeface="Cambria Math" panose="02040503050406030204" charset="0"/>
+                                    </a:rPr>
+                                    <m:t>𝜋</m:t>
+                                  </m:r>
+                                  <m:r>
+                                    <a:rPr lang="en-US" altLang="zh-CN" i="1">
+                                      <a:latin typeface="Cambria Math" panose="02040503050406030204" charset="0"/>
+                                      <a:cs typeface="Cambria Math" panose="02040503050406030204" charset="0"/>
+                                    </a:rPr>
+                                    <m:t>𝑓𝑡</m:t>
+                                  </m:r>
+                                </m:sup>
+                              </m:sSup>
+                              <m:r>
+                                <a:rPr lang="en-US" altLang="zh-CN" i="1">
+                                  <a:latin typeface="Cambria Math" panose="02040503050406030204" charset="0"/>
+                                  <a:cs typeface="Cambria Math" panose="02040503050406030204" charset="0"/>
+                                </a:rPr>
+                                <m:t> </m:t>
+                              </m:r>
+                              <m:r>
+                                <a:rPr lang="en-US" altLang="zh-CN" i="1">
+                                  <a:latin typeface="Cambria Math" panose="02040503050406030204" charset="0"/>
+                                  <a:cs typeface="Cambria Math" panose="02040503050406030204" charset="0"/>
+                                </a:rPr>
+                                <m:t>d</m:t>
+                              </m:r>
+                              <m:r>
+                                <a:rPr lang="en-US" altLang="zh-CN" i="1">
+                                  <a:latin typeface="Cambria Math" panose="02040503050406030204" charset="0"/>
+                                  <a:cs typeface="Cambria Math" panose="02040503050406030204" charset="0"/>
+                                </a:rPr>
+                                <m:t>𝑡</m:t>
+                              </m:r>
+                            </m:e>
+                          </m:d>
+                        </m:e>
+                        <m:sup>
+                          <m:r>
+                            <a:rPr lang="en-US" altLang="zh-CN" i="1">
+                              <a:latin typeface="Cambria Math" panose="02040503050406030204" charset="0"/>
+                              <a:cs typeface="Cambria Math" panose="02040503050406030204" charset="0"/>
+                            </a:rPr>
+                            <m:t>2</m:t>
+                          </m:r>
+                        </m:sup>
+                      </m:sSup>
+                    </m:oMath>
+                  </m:oMathPara>
+                </a14:m>
+                <a:endParaRPr lang="en-US" altLang="zh-CN" i="1">
+                  <a:latin typeface="Cambria Math" panose="02040503050406030204" charset="0"/>
+                  <a:cs typeface="Cambria Math" panose="02040503050406030204" charset="0"/>
+                </a:endParaRPr>
+              </a:p>
+            </p:txBody>
+          </p:sp>
+        </mc:Choice>
+        <mc:Fallback>
+          <p:sp>
+            <p:nvSpPr>
+              <p:cNvPr id="9" name="文本框 8"/>
+              <p:cNvSpPr txBox="1">
+                <a:spLocks noRot="1" noChangeAspect="1" noMove="1" noResize="1" noEditPoints="1" noAdjustHandles="1" noChangeArrowheads="1" noChangeShapeType="1" noTextEdit="1"/>
+              </p:cNvSpPr>
+              <p:nvPr/>
+            </p:nvSpPr>
+            <p:spPr>
+              <a:xfrm>
+                <a:off x="2465324" y="4265866"/>
+                <a:ext cx="7260590" cy="760095"/>
+              </a:xfrm>
+              <a:prstGeom prst="rect">
+                <a:avLst/>
+              </a:prstGeom>
+              <a:blipFill rotWithShape="1">
+                <a:blip r:embed="rId3"/>
+                <a:stretch>
+                  <a:fillRect l="-4" t="-75" r="4" b="75"/>
+                </a:stretch>
+              </a:blipFill>
+            </p:spPr>
+            <p:txBody>
+              <a:bodyPr/>
+              <a:lstStyle/>
+              <a:p>
+                <a:r>
+                  <a:rPr lang="zh-CN" altLang="en-US">
+                    <a:noFill/>
+                  </a:rPr>
+                  <a:t> </a:t>
+                </a:r>
+              </a:p>
+            </p:txBody>
+          </p:sp>
+        </mc:Fallback>
+      </mc:AlternateContent>
+      <mc:AlternateContent xmlns:mc="http://schemas.openxmlformats.org/markup-compatibility/2006">
+        <mc:Choice xmlns:a14="http://schemas.microsoft.com/office/drawing/2010/main" Requires="a14">
+          <p:sp>
+            <p:nvSpPr>
+              <p:cNvPr id="10" name="文本框 9"/>
+              <p:cNvSpPr txBox="1"/>
+              <p:nvPr/>
+            </p:nvSpPr>
+            <p:spPr>
+              <a:xfrm>
+                <a:off x="2652649" y="5147881"/>
+                <a:ext cx="6837045" cy="660400"/>
+              </a:xfrm>
+              <a:prstGeom prst="rect">
+                <a:avLst/>
+              </a:prstGeom>
+              <a:noFill/>
+            </p:spPr>
+            <p:txBody>
+              <a:bodyPr wrap="none" rtlCol="0" anchor="t">
+                <a:spAutoFit/>
+              </a:bodyPr>
+              <a:p>
+                <a:pPr algn="l"/>
+                <a14:m>
+                  <m:oMathPara xmlns:m="http://schemas.openxmlformats.org/officeDocument/2006/math">
+                    <m:oMathParaPr>
+                      <m:jc m:val="centerGroup"/>
+                    </m:oMathParaPr>
+                    <m:oMath xmlns:m="http://schemas.openxmlformats.org/officeDocument/2006/math">
+                      <m:sSub>
+                        <m:sSubPr>
+                          <m:ctrlPr>
+                            <a:rPr lang="en-US" altLang="zh-CN" i="1">
+                              <a:latin typeface="Cambria Math" panose="02040503050406030204" charset="0"/>
+                              <a:cs typeface="Cambria Math" panose="02040503050406030204" charset="0"/>
+                            </a:rPr>
+                          </m:ctrlPr>
+                        </m:sSubPr>
+                        <m:e>
+                          <m:r>
+                            <a:rPr lang="en-US" altLang="zh-CN" i="1">
+                              <a:latin typeface="Cambria Math" panose="02040503050406030204" charset="0"/>
+                              <a:cs typeface="Cambria Math" panose="02040503050406030204" charset="0"/>
+                            </a:rPr>
+                            <m:t>𝑓</m:t>
+                          </m:r>
+                        </m:e>
+                        <m:sub>
+                          <m:r>
+                            <a:rPr lang="en-US" altLang="zh-CN" i="1">
+                              <a:latin typeface="Cambria Math" panose="02040503050406030204" charset="0"/>
+                              <a:cs typeface="Cambria Math" panose="02040503050406030204" charset="0"/>
+                            </a:rPr>
+                            <m:t>𝑏</m:t>
+                          </m:r>
+                        </m:sub>
+                      </m:sSub>
+                      <m:r>
+                        <a:rPr lang="en-US" altLang="zh-CN" i="1">
+                          <a:latin typeface="Cambria Math" panose="02040503050406030204" charset="0"/>
+                          <a:cs typeface="Cambria Math" panose="02040503050406030204" charset="0"/>
+                        </a:rPr>
+                        <m:t>(</m:t>
+                      </m:r>
+                      <m:r>
+                        <a:rPr lang="en-US" altLang="zh-CN" i="1">
+                          <a:latin typeface="Cambria Math" panose="02040503050406030204" charset="0"/>
+                          <a:cs typeface="Cambria Math" panose="02040503050406030204" charset="0"/>
+                        </a:rPr>
+                        <m:t>𝑡</m:t>
+                      </m:r>
+                      <m:r>
+                        <a:rPr lang="en-US" altLang="zh-CN" i="1">
+                          <a:latin typeface="Cambria Math" panose="02040503050406030204" charset="0"/>
+                          <a:cs typeface="Cambria Math" panose="02040503050406030204" charset="0"/>
+                        </a:rPr>
+                        <m:t>)=</m:t>
+                      </m:r>
+                      <m:f>
+                        <m:fPr>
+                          <m:ctrlPr>
+                            <a:rPr lang="en-US" altLang="zh-CN" i="1">
+                              <a:latin typeface="Cambria Math" panose="02040503050406030204" charset="0"/>
+                              <a:cs typeface="Cambria Math" panose="02040503050406030204" charset="0"/>
+                            </a:rPr>
+                          </m:ctrlPr>
+                        </m:fPr>
+                        <m:num>
+                          <m:r>
+                            <a:rPr lang="en-US" altLang="zh-CN" i="1">
+                              <a:latin typeface="Cambria Math" panose="02040503050406030204" charset="0"/>
+                              <a:cs typeface="Cambria Math" panose="02040503050406030204" charset="0"/>
+                            </a:rPr>
+                            <m:t>1</m:t>
+                          </m:r>
+                        </m:num>
+                        <m:den>
+                          <m:r>
+                            <a:rPr lang="en-US" altLang="zh-CN" i="1">
+                              <a:latin typeface="Cambria Math" panose="02040503050406030204" charset="0"/>
+                              <a:cs typeface="Cambria Math" panose="02040503050406030204" charset="0"/>
+                            </a:rPr>
+                            <m:t>2</m:t>
+                          </m:r>
+                          <m:r>
+                            <a:rPr lang="en-US" altLang="zh-CN" i="1">
+                              <a:latin typeface="Cambria Math" panose="02040503050406030204" charset="0"/>
+                              <a:cs typeface="Cambria Math" panose="02040503050406030204" charset="0"/>
+                            </a:rPr>
+                            <m:t>𝜋</m:t>
+                          </m:r>
+                        </m:den>
+                      </m:f>
+                      <m:f>
+                        <m:fPr>
+                          <m:ctrlPr>
+                            <a:rPr lang="en-US" altLang="zh-CN" i="1">
+                              <a:latin typeface="Cambria Math" panose="02040503050406030204" charset="0"/>
+                              <a:cs typeface="Cambria Math" panose="02040503050406030204" charset="0"/>
+                            </a:rPr>
+                          </m:ctrlPr>
+                        </m:fPr>
+                        <m:num>
+                          <m:r>
+                            <a:rPr lang="en-US" altLang="zh-CN" i="1">
+                              <a:latin typeface="Cambria Math" panose="02040503050406030204" charset="0"/>
+                              <a:cs typeface="Cambria Math" panose="02040503050406030204" charset="0"/>
+                            </a:rPr>
+                            <m:t>d</m:t>
+                          </m:r>
+                          <m:r>
+                            <a:rPr lang="en-US" altLang="zh-CN" i="1">
+                              <a:latin typeface="Cambria Math" panose="02040503050406030204" charset="0"/>
+                              <a:cs typeface="Cambria Math" panose="02040503050406030204" charset="0"/>
+                            </a:rPr>
+                            <m:t>𝛥𝜙</m:t>
+                          </m:r>
+                          <m:r>
+                            <a:rPr lang="en-US" altLang="zh-CN" i="1">
+                              <a:latin typeface="Cambria Math" panose="02040503050406030204" charset="0"/>
+                              <a:cs typeface="Cambria Math" panose="02040503050406030204" charset="0"/>
+                            </a:rPr>
+                            <m:t>(</m:t>
+                          </m:r>
+                          <m:r>
+                            <a:rPr lang="en-US" altLang="zh-CN" i="1">
+                              <a:latin typeface="Cambria Math" panose="02040503050406030204" charset="0"/>
+                              <a:cs typeface="Cambria Math" panose="02040503050406030204" charset="0"/>
+                            </a:rPr>
+                            <m:t>𝑡</m:t>
+                          </m:r>
+                          <m:r>
+                            <a:rPr lang="en-US" altLang="zh-CN" i="1">
+                              <a:latin typeface="Cambria Math" panose="02040503050406030204" charset="0"/>
+                              <a:cs typeface="Cambria Math" panose="02040503050406030204" charset="0"/>
+                            </a:rPr>
+                            <m:t>)</m:t>
+                          </m:r>
+                        </m:num>
+                        <m:den>
+                          <m:r>
+                            <a:rPr lang="en-US" altLang="zh-CN" i="1">
+                              <a:latin typeface="Cambria Math" panose="02040503050406030204" charset="0"/>
+                              <a:cs typeface="Cambria Math" panose="02040503050406030204" charset="0"/>
+                            </a:rPr>
+                            <m:t>d</m:t>
+                          </m:r>
+                          <m:r>
+                            <a:rPr lang="en-US" altLang="zh-CN" i="1">
+                              <a:latin typeface="Cambria Math" panose="02040503050406030204" charset="0"/>
+                              <a:cs typeface="Cambria Math" panose="02040503050406030204" charset="0"/>
+                            </a:rPr>
+                            <m:t>𝑡</m:t>
+                          </m:r>
+                        </m:den>
+                      </m:f>
+                      <m:r>
+                        <a:rPr lang="en-US" altLang="zh-CN" i="1">
+                          <a:latin typeface="Cambria Math" panose="02040503050406030204" charset="0"/>
+                          <a:cs typeface="Cambria Math" panose="02040503050406030204" charset="0"/>
+                        </a:rPr>
+                        <m:t>=</m:t>
+                      </m:r>
+                      <m:f>
+                        <m:fPr>
+                          <m:ctrlPr>
+                            <a:rPr lang="en-US" altLang="zh-CN" i="1">
+                              <a:latin typeface="Cambria Math" panose="02040503050406030204" charset="0"/>
+                              <a:cs typeface="Cambria Math" panose="02040503050406030204" charset="0"/>
+                            </a:rPr>
+                          </m:ctrlPr>
+                        </m:fPr>
+                        <m:num>
+                          <m:r>
+                            <a:rPr lang="en-US" altLang="zh-CN" i="1">
+                              <a:latin typeface="Cambria Math" panose="02040503050406030204" charset="0"/>
+                              <a:cs typeface="Cambria Math" panose="02040503050406030204" charset="0"/>
+                            </a:rPr>
+                            <m:t>2</m:t>
+                          </m:r>
+                          <m:r>
+                            <a:rPr lang="en-US" altLang="zh-CN" i="1">
+                              <a:latin typeface="Cambria Math" panose="02040503050406030204" charset="0"/>
+                              <a:cs typeface="Cambria Math" panose="02040503050406030204" charset="0"/>
+                            </a:rPr>
+                            <m:t>𝑣</m:t>
+                          </m:r>
+                          <m:r>
+                            <a:rPr lang="en-US" altLang="zh-CN" i="1">
+                              <a:latin typeface="Cambria Math" panose="02040503050406030204" charset="0"/>
+                              <a:cs typeface="Cambria Math" panose="02040503050406030204" charset="0"/>
+                            </a:rPr>
+                            <m:t>(</m:t>
+                          </m:r>
+                          <m:r>
+                            <a:rPr lang="en-US" altLang="zh-CN" i="1">
+                              <a:latin typeface="Cambria Math" panose="02040503050406030204" charset="0"/>
+                              <a:cs typeface="Cambria Math" panose="02040503050406030204" charset="0"/>
+                            </a:rPr>
+                            <m:t>𝑡</m:t>
+                          </m:r>
+                          <m:r>
+                            <a:rPr lang="en-US" altLang="zh-CN" i="1">
+                              <a:latin typeface="Cambria Math" panose="02040503050406030204" charset="0"/>
+                              <a:cs typeface="Cambria Math" panose="02040503050406030204" charset="0"/>
+                            </a:rPr>
+                            <m:t>)</m:t>
+                          </m:r>
+                        </m:num>
+                        <m:den>
+                          <m:sSub>
+                            <m:sSubPr>
+                              <m:ctrlPr>
+                                <a:rPr lang="en-US" altLang="zh-CN" i="1">
+                                  <a:latin typeface="Cambria Math" panose="02040503050406030204" charset="0"/>
+                                  <a:cs typeface="Cambria Math" panose="02040503050406030204" charset="0"/>
+                                </a:rPr>
+                              </m:ctrlPr>
+                            </m:sSubPr>
+                            <m:e>
+                              <m:r>
+                                <a:rPr lang="en-US" altLang="zh-CN" i="1">
+                                  <a:latin typeface="Cambria Math" panose="02040503050406030204" charset="0"/>
+                                  <a:cs typeface="Cambria Math" panose="02040503050406030204" charset="0"/>
+                                </a:rPr>
+                                <m:t>𝜆</m:t>
+                              </m:r>
+                            </m:e>
+                            <m:sub>
+                              <m:r>
+                                <a:rPr lang="en-US" altLang="zh-CN" i="1">
+                                  <a:latin typeface="Cambria Math" panose="02040503050406030204" charset="0"/>
+                                  <a:cs typeface="Cambria Math" panose="02040503050406030204" charset="0"/>
+                                </a:rPr>
+                                <m:t>0</m:t>
+                              </m:r>
+                            </m:sub>
+                          </m:sSub>
+                        </m:den>
+                      </m:f>
+                    </m:oMath>
+                  </m:oMathPara>
+                </a14:m>
+                <a:endParaRPr lang="en-US" altLang="zh-CN" i="1">
+                  <a:latin typeface="Cambria Math" panose="02040503050406030204" charset="0"/>
+                  <a:cs typeface="Cambria Math" panose="02040503050406030204" charset="0"/>
+                </a:endParaRPr>
+              </a:p>
+            </p:txBody>
+          </p:sp>
+        </mc:Choice>
+        <mc:Fallback>
+          <p:sp>
+            <p:nvSpPr>
+              <p:cNvPr id="10" name="文本框 9"/>
+              <p:cNvSpPr txBox="1">
+                <a:spLocks noRot="1" noChangeAspect="1" noMove="1" noResize="1" noEditPoints="1" noAdjustHandles="1" noChangeArrowheads="1" noChangeShapeType="1" noTextEdit="1"/>
+              </p:cNvSpPr>
+              <p:nvPr/>
+            </p:nvSpPr>
+            <p:spPr>
+              <a:xfrm>
+                <a:off x="2652649" y="5147881"/>
+                <a:ext cx="6837045" cy="660400"/>
+              </a:xfrm>
+              <a:prstGeom prst="rect">
+                <a:avLst/>
+              </a:prstGeom>
+              <a:blipFill rotWithShape="1">
+                <a:blip r:embed="rId4"/>
+                <a:stretch>
+                  <a:fillRect l="-4" t="-87" r="4" b="87"/>
+                </a:stretch>
+              </a:blipFill>
+            </p:spPr>
+            <p:txBody>
+              <a:bodyPr/>
+              <a:lstStyle/>
+              <a:p>
+                <a:r>
+                  <a:rPr lang="zh-CN" altLang="en-US">
+                    <a:noFill/>
+                  </a:rPr>
+                  <a:t> </a:t>
+                </a:r>
+              </a:p>
+            </p:txBody>
+          </p:sp>
+        </mc:Fallback>
+      </mc:AlternateContent>
+      <p:sp>
+        <p:nvSpPr>
+          <p:cNvPr id="11" name="文本框 10"/>
+          <p:cNvSpPr txBox="1"/>
+          <p:nvPr/>
+        </p:nvSpPr>
+        <p:spPr>
+          <a:xfrm>
+            <a:off x="593725" y="1694180"/>
+            <a:ext cx="10766425" cy="583565"/>
+          </a:xfrm>
+          <a:prstGeom prst="rect">
+            <a:avLst/>
+          </a:prstGeom>
+        </p:spPr>
+        <p:txBody>
+          <a:bodyPr wrap="square">
+            <a:spAutoFit/>
+          </a:bodyPr>
+          <a:p>
+            <a:r>
+              <a:rPr lang="zh-CN" altLang="en-US" sz="1600">
+                <a:latin typeface="微软雅黑" panose="020B0503020204020204" pitchFamily="34" charset="-122"/>
+                <a:ea typeface="微软雅黑" panose="020B0503020204020204" pitchFamily="34" charset="-122"/>
+                <a:cs typeface="微软雅黑" panose="020B0503020204020204" pitchFamily="34" charset="-122"/>
+              </a:rPr>
+              <a:t>参考光与从运动界面反射回来的信号光发生干涉。界面位移 </a:t>
+            </a:r>
+            <a:r>
+              <a:rPr lang="en-US" altLang="zh-CN" sz="1600">
+                <a:latin typeface="微软雅黑" panose="020B0503020204020204" pitchFamily="34" charset="-122"/>
+                <a:ea typeface="微软雅黑" panose="020B0503020204020204" pitchFamily="34" charset="-122"/>
+                <a:cs typeface="微软雅黑" panose="020B0503020204020204" pitchFamily="34" charset="-122"/>
+              </a:rPr>
+              <a:t>x(t)</a:t>
+            </a:r>
+            <a:r>
+              <a:rPr lang="zh-CN" altLang="en-US" sz="1600">
+                <a:latin typeface="微软雅黑" panose="020B0503020204020204" pitchFamily="34" charset="-122"/>
+                <a:ea typeface="微软雅黑" panose="020B0503020204020204" pitchFamily="34" charset="-122"/>
+                <a:cs typeface="微软雅黑" panose="020B0503020204020204" pitchFamily="34" charset="-122"/>
+              </a:rPr>
+              <a:t>改变两束光的相位差，因此探测器输出随时间振荡的电压信号。</a:t>
+            </a:r>
+            <a:endParaRPr lang="zh-CN" altLang="en-US" sz="1600">
               <a:latin typeface="微软雅黑" panose="020B0503020204020204" pitchFamily="34" charset="-122"/>
               <a:ea typeface="微软雅黑" panose="020B0503020204020204" pitchFamily="34" charset="-122"/>
-              <a:cs typeface="微软雅黑" panose="020B0503020204020204" pitchFamily="34" charset="-120"/>
+              <a:cs typeface="微软雅黑" panose="020B0503020204020204" pitchFamily="34" charset="-122"/>
+            </a:endParaRPr>
+          </a:p>
+        </p:txBody>
+      </p:sp>
+      <p:sp>
+        <p:nvSpPr>
+          <p:cNvPr id="12" name="文本框 11"/>
+          <p:cNvSpPr txBox="1"/>
+          <p:nvPr/>
+        </p:nvSpPr>
+        <p:spPr>
+          <a:xfrm>
+            <a:off x="594360" y="3720465"/>
+            <a:ext cx="10765155" cy="583565"/>
+          </a:xfrm>
+          <a:prstGeom prst="rect">
+            <a:avLst/>
+          </a:prstGeom>
+        </p:spPr>
+        <p:txBody>
+          <a:bodyPr wrap="square">
+            <a:spAutoFit/>
+          </a:bodyPr>
+          <a:p>
+            <a:r>
+              <a:rPr lang="en-US" altLang="zh-CN" sz="1600">
+                <a:latin typeface="微软雅黑" panose="020B0503020204020204" pitchFamily="34" charset="-122"/>
+                <a:ea typeface="微软雅黑" panose="020B0503020204020204" pitchFamily="34" charset="-122"/>
+                <a:cs typeface="微软雅黑" panose="020B0503020204020204" pitchFamily="34" charset="-122"/>
+              </a:rPr>
+              <a:t>STFT </a:t>
+            </a:r>
+            <a:r>
+              <a:rPr lang="zh-CN" altLang="en-US" sz="1600">
+                <a:latin typeface="微软雅黑" panose="020B0503020204020204" pitchFamily="34" charset="-122"/>
+                <a:ea typeface="微软雅黑" panose="020B0503020204020204" pitchFamily="34" charset="-122"/>
+                <a:cs typeface="微软雅黑" panose="020B0503020204020204" pitchFamily="34" charset="-122"/>
+              </a:rPr>
+              <a:t>用一个滑动时间窗逐段计算频谱，得到时频图。横轴是时间，纵轴是频率，颜色表示局部频谱强度。图中主要谱线的轨迹就是候选拍频脊线。</a:t>
+            </a:r>
+            <a:endParaRPr lang="zh-CN" altLang="en-US" sz="1600">
+              <a:latin typeface="微软雅黑" panose="020B0503020204020204" pitchFamily="34" charset="-122"/>
+              <a:ea typeface="微软雅黑" panose="020B0503020204020204" pitchFamily="34" charset="-122"/>
+              <a:cs typeface="微软雅黑" panose="020B0503020204020204" pitchFamily="34" charset="-122"/>
             </a:endParaRPr>
           </a:p>
         </p:txBody>
